--- a/tutorial3/LLM_Practices_ZYP.pptx
+++ b/tutorial3/LLM_Practices_ZYP.pptx
@@ -223,7 +223,7 @@
           <a:p>
             <a:fld id="{DA614C3F-0AF5-DA4C-84F9-3990FF0B58A5}" type="datetimeFigureOut">
               <a:rPr lang="en-US" smtClean="0"/>
-              <a:t>9/9/25</a:t>
+              <a:t>9/10/25</a:t>
             </a:fld>
             <a:endParaRPr lang="en-US"/>
           </a:p>
@@ -400,7 +400,7 @@
           <a:p>
             <a:fld id="{9F2D4C33-E834-184F-A85B-4B1A7D742F82}" type="datetimeFigureOut">
               <a:rPr lang="en-US" smtClean="0"/>
-              <a:t>9/9/25</a:t>
+              <a:t>9/10/25</a:t>
             </a:fld>
             <a:endParaRPr lang="en-US"/>
           </a:p>
@@ -19963,8 +19963,8 @@
         </p:nvSpPr>
         <p:spPr>
           <a:xfrm>
-            <a:off x="1503501" y="6394605"/>
-            <a:ext cx="6391493" cy="369332"/>
+            <a:off x="1504009" y="6276104"/>
+            <a:ext cx="5025735" cy="523220"/>
           </a:xfrm>
           <a:prstGeom prst="rect">
             <a:avLst/>
@@ -19978,9 +19978,21 @@
           <a:lstStyle/>
           <a:p>
             <a:r>
-              <a:rPr lang="en-US" dirty="0"/>
+              <a:rPr lang="en-US" sz="1400" dirty="0">
+                <a:hlinkClick r:id="rId2"/>
+              </a:rPr>
               <a:t>https://www.datacamp.com/tutorial/how-transformers-work</a:t>
             </a:r>
+            <a:endParaRPr lang="en-US" sz="1400" dirty="0"/>
+          </a:p>
+          <a:p>
+            <a:r>
+              <a:rPr lang="en-US" sz="1400" dirty="0">
+                <a:hlinkClick r:id="rId3"/>
+              </a:rPr>
+              <a:t>https://epichka.com/blog/2023/qkv-transformer</a:t>
+            </a:r>
+            <a:endParaRPr lang="en-US" sz="1400" dirty="0"/>
           </a:p>
         </p:txBody>
       </p:sp>
@@ -22751,8 +22763,8 @@
         </p:nvSpPr>
         <p:spPr>
           <a:xfrm>
-            <a:off x="411481" y="580876"/>
-            <a:ext cx="8795384" cy="5909310"/>
+            <a:off x="411481" y="689461"/>
+            <a:ext cx="8795384" cy="5632311"/>
           </a:xfrm>
           <a:prstGeom prst="rect">
             <a:avLst/>
@@ -22877,12 +22889,8 @@
               <a:buChar char="-"/>
             </a:pPr>
             <a:r>
-              <a:rPr lang="en-US" dirty="0" err="1"/>
-              <a:t>Flowchar</a:t>
-            </a:r>
-            <a:r>
               <a:rPr lang="en-US" dirty="0"/>
-              <a:t> &amp; </a:t>
+              <a:t>Flowchart &amp; </a:t>
             </a:r>
             <a:r>
               <a:rPr lang="en-US" dirty="0" err="1"/>
@@ -22911,13 +22919,10 @@
               </a:rPr>
               <a:t>https://flowchartai.org</a:t>
             </a:r>
-            <a:endParaRPr lang="en-US" dirty="0"/>
-          </a:p>
-          <a:p>
-            <a:pPr marL="742950" lvl="1" indent="-285750">
-              <a:buFontTx/>
-              <a:buChar char="-"/>
-            </a:pPr>
+            <a:r>
+              <a:rPr lang="en-US" dirty="0"/>
+              <a:t>, </a:t>
+            </a:r>
             <a:r>
               <a:rPr lang="en-US" dirty="0">
                 <a:hlinkClick r:id="rId5"/>
